--- a/brand/flex-capability-sheet.pptx
+++ b/brand/flex-capability-sheet.pptx
@@ -1185,7 +1185,7 @@
                 <a:ea typeface="Century Gothic" pitchFamily="34" charset="-122"/>
                 <a:cs typeface="Century Gothic" pitchFamily="34" charset="-120"/>
               </a:rPr>
-              <a:t>[One sentence a client would recognise, not a category name.]</a:t>
+              <a:t>[One sentence a client would recognize, not a category name.]</a:t>
             </a:r>
             <a:endParaRPr lang="en-US" sz="1150" dirty="0"/>
           </a:p>
